--- a/leadership-readout/leadership-readout.pptx
+++ b/leadership-readout/leadership-readout.pptx
@@ -5186,7 +5186,7 @@
                 <a:ea typeface="Calibri" pitchFamily="34" charset="-122"/>
                 <a:cs typeface="Calibri" pitchFamily="34" charset="-120"/>
               </a:rPr>
-              <a:t>Invest in the loop; validate cross-attn through data, not blind sweeps</a:t>
+              <a:t>Invest in the loop; validate cross-attn through data and replay, not blind architecture sweeps</a:t>
             </a:r>
             <a:endParaRPr lang="en-US" sz="2800" dirty="0"/>
           </a:p>
@@ -6857,7 +6857,7 @@
                 <a:ea typeface="Calibri Light" pitchFamily="34" charset="-122"/>
                 <a:cs typeface="Calibri Light" pitchFamily="34" charset="-120"/>
               </a:rPr>
-              <a:t>v1 deck (May 18) said: </a:t>
+              <a:t>v1 deck (May 18) </a:t>
             </a:r>
             <a:pPr indent="0" marL="0">
               <a:spcAft>
@@ -6874,7 +6874,7 @@
                 <a:ea typeface="Calibri Light" pitchFamily="34" charset="-122"/>
                 <a:cs typeface="Calibri Light" pitchFamily="34" charset="-120"/>
               </a:rPr>
-              <a:t>"cross-attention does not earn its keep; invest in the loop, not the architecture."</a:t>
+              <a:t>framed the result as a clean negative and de-prioritized architecture.</a:t>
             </a:r>
             <a:endParaRPr lang="en-US" sz="1300" dirty="0"/>
           </a:p>
@@ -6894,7 +6894,7 @@
                 <a:ea typeface="Calibri Light" pitchFamily="34" charset="-122"/>
                 <a:cs typeface="Calibri Light" pitchFamily="34" charset="-120"/>
               </a:rPr>
-              <a:t>v2 (this deck, May 22) says: </a:t>
+              <a:t>v2 (this deck, May 22) </a:t>
             </a:r>
             <a:pPr indent="0" marL="0">
               <a:spcAft>
@@ -6911,7 +6911,7 @@
                 <a:ea typeface="Calibri Light" pitchFamily="34" charset="-122"/>
                 <a:cs typeface="Calibri Light" pitchFamily="34" charset="-120"/>
               </a:rPr>
-              <a:t>the v3 null was a data-design artifact. v4 fixed the data and produced a CI-separated architectural win. v5 confirmed the win is dial-robust but exposed a separate data-shaped ceiling.</a:t>
+              <a:t>corrects that: v3 was data-confounded, v4 showed a CI-separated synthetic win, and v5 exposed a data-shaped ceiling.</a:t>
             </a:r>
             <a:endParaRPr lang="en-US" sz="1300" dirty="0"/>
           </a:p>
@@ -11936,7 +11936,7 @@
                 <a:ea typeface="Calibri Light" pitchFamily="34" charset="-122"/>
                 <a:cs typeface="Calibri Light" pitchFamily="34" charset="-120"/>
               </a:rPr>
-              <a:t>"Cross-attention does not separate from structured-as-text concat within 95% bootstrap CIs. Gates rode their initialization. Invest in the loop, not the architecture."</a:t>
+              <a:t>"Cross-attention did not separate from structured-as-text concat within 95% bootstrap CIs; gates rode their initialization. That v3 reading was honest but later superseded by the v4/v5 result."</a:t>
             </a:r>
             <a:endParaRPr lang="en-US" sz="1300" dirty="0"/>
           </a:p>
